--- a/origin-pptx/style-guide/template_v3.pptx
+++ b/origin-pptx/style-guide/template_v3.pptx
@@ -7218,50 +7218,6 @@
           <a:chExt cx="0" cy="0"/>
         </a:xfrm>
       </p:grpSpPr>
-      <p:sp>
-        <p:nvSpPr>
-          <p:cNvPr id="12" name="Copyright">
-            <a:extLst>
-              <a:ext uri="{FF2B5EF4-FFF2-40B4-BE49-F238E27FC236}">
-                <a16:creationId xmlns:a16="http://schemas.microsoft.com/office/drawing/2014/main" id="{20F0ABEC-F6BD-F879-26F3-EFA6B16EA4B2}"/>
-              </a:ext>
-            </a:extLst>
-          </p:cNvPr>
-          <p:cNvSpPr txBox="1"/>
-          <p:nvPr userDrawn="1"/>
-        </p:nvSpPr>
-        <p:spPr>
-          <a:xfrm>
-            <a:off x="12163031" y="3404125"/>
-            <a:ext cx="45719" cy="3476506"/>
-          </a:xfrm>
-          <a:prstGeom prst="rect">
-            <a:avLst/>
-          </a:prstGeom>
-          <a:noFill/>
-        </p:spPr>
-        <p:txBody>
-          <a:bodyPr vert="vert270" wrap="square" rtlCol="0" anchor="b">
-            <a:noAutofit/>
-          </a:bodyPr>
-          <a:lstStyle/>
-          <a:p>
-            <a:pPr algn="l"/>
-            <a:r>
-              <a:rPr kumimoji="1" lang="en-US" sz="600" baseline="0" dirty="0">
-                <a:solidFill>
-                  <a:schemeClr val="bg1">
-                    <a:lumMod val="75000"/>
-                  </a:schemeClr>
-                </a:solidFill>
-                <a:latin typeface="Hiragino Sans W4" panose="020B0400000000000000" pitchFamily="34" charset="-128"/>
-                <a:ea typeface="Noto Sans CJK JP"/>
-              </a:rPr>
-              <a:t>Copyright© 2026 オフィスオハナ合同会社 All Rights Reserved</a:t>
-            </a:r>
-          </a:p>
-        </p:txBody>
-      </p:sp>
       <p:sp>
         <p:nvSpPr>
           <p:cNvPr id="6" name="Slide Number"/>
